--- a/reports/2026-09.pptx
+++ b/reports/2026-09.pptx
@@ -6766,7 +6766,7 @@
               </a:lnSpc>
             </a:pPr>
             <a:r>
-              <a:rPr sz="1300">
+              <a:rPr sz="1000">
                 <a:solidFill>
                   <a:srgbClr val="F5F3EC"/>
                 </a:solidFill>
@@ -6888,7 +6888,7 @@
               </a:lnSpc>
             </a:pPr>
             <a:r>
-              <a:rPr sz="1300">
+              <a:rPr sz="1000">
                 <a:solidFill>
                   <a:srgbClr val="F5F3EC"/>
                 </a:solidFill>
@@ -7010,7 +7010,7 @@
               </a:lnSpc>
             </a:pPr>
             <a:r>
-              <a:rPr sz="1300">
+              <a:rPr sz="1000">
                 <a:solidFill>
                   <a:srgbClr val="F5F3EC"/>
                 </a:solidFill>
@@ -7132,7 +7132,7 @@
               </a:lnSpc>
             </a:pPr>
             <a:r>
-              <a:rPr sz="1300">
+              <a:rPr sz="1000">
                 <a:solidFill>
                   <a:srgbClr val="F5F3EC"/>
                 </a:solidFill>
@@ -7254,7 +7254,7 @@
               </a:lnSpc>
             </a:pPr>
             <a:r>
-              <a:rPr sz="1300">
+              <a:rPr sz="1000">
                 <a:solidFill>
                   <a:srgbClr val="F5F3EC"/>
                 </a:solidFill>
@@ -7376,7 +7376,7 @@
               </a:lnSpc>
             </a:pPr>
             <a:r>
-              <a:rPr sz="1300">
+              <a:rPr sz="1000">
                 <a:solidFill>
                   <a:srgbClr val="F5F3EC"/>
                 </a:solidFill>
